--- a/src/main/resources/static/image/default/soldier core.pptx
+++ b/src/main/resources/static/image/default/soldier core.pptx
@@ -158,10 +158,9 @@
           </a:lstStyle>
           <a:p>
             <a:r>
-              <a:rPr kumimoji="1" lang="ja-JP" altLang="en-US" smtClean="0"/>
+              <a:rPr kumimoji="1" lang="ja-JP" altLang="en-US"/>
               <a:t>マスター タイトルの書式設定</a:t>
             </a:r>
-            <a:endParaRPr kumimoji="1" lang="ja-JP" altLang="en-US"/>
           </a:p>
         </p:txBody>
       </p:sp>
@@ -223,10 +222,9 @@
           </a:lstStyle>
           <a:p>
             <a:r>
-              <a:rPr kumimoji="1" lang="ja-JP" altLang="en-US" smtClean="0"/>
+              <a:rPr kumimoji="1" lang="ja-JP" altLang="en-US"/>
               <a:t>マスター サブタイトルの書式設定</a:t>
             </a:r>
-            <a:endParaRPr kumimoji="1" lang="ja-JP" altLang="en-US"/>
           </a:p>
         </p:txBody>
       </p:sp>
@@ -247,7 +245,7 @@
           <a:p>
             <a:fld id="{0E085FA6-3BB9-47BA-8D81-299A75D1B58A}" type="datetimeFigureOut">
               <a:rPr kumimoji="1" lang="ja-JP" altLang="en-US" smtClean="0"/>
-              <a:t>2025/4/17</a:t>
+              <a:t>2026/3/5</a:t>
             </a:fld>
             <a:endParaRPr kumimoji="1" lang="ja-JP" altLang="en-US"/>
           </a:p>
@@ -341,10 +339,9 @@
           <a:lstStyle/>
           <a:p>
             <a:r>
-              <a:rPr kumimoji="1" lang="ja-JP" altLang="en-US" smtClean="0"/>
+              <a:rPr kumimoji="1" lang="ja-JP" altLang="en-US"/>
               <a:t>マスター タイトルの書式設定</a:t>
             </a:r>
-            <a:endParaRPr kumimoji="1" lang="ja-JP" altLang="en-US"/>
           </a:p>
         </p:txBody>
       </p:sp>
@@ -365,70 +362,69 @@
           <a:p>
             <a:pPr lvl="0"/>
             <a:r>
-              <a:rPr kumimoji="1" lang="ja-JP" altLang="en-US" smtClean="0"/>
+              <a:rPr kumimoji="1" lang="ja-JP" altLang="en-US"/>
               <a:t>マスター テキストの書式設定</a:t>
             </a:r>
           </a:p>
           <a:p>
             <a:pPr lvl="1"/>
             <a:r>
-              <a:rPr kumimoji="1" lang="ja-JP" altLang="en-US" smtClean="0"/>
+              <a:rPr kumimoji="1" lang="ja-JP" altLang="en-US"/>
               <a:t>第 </a:t>
             </a:r>
             <a:r>
-              <a:rPr kumimoji="1" lang="en-US" altLang="ja-JP" smtClean="0"/>
+              <a:rPr kumimoji="1" lang="en-US" altLang="ja-JP"/>
               <a:t>2 </a:t>
             </a:r>
             <a:r>
-              <a:rPr kumimoji="1" lang="ja-JP" altLang="en-US" smtClean="0"/>
+              <a:rPr kumimoji="1" lang="ja-JP" altLang="en-US"/>
               <a:t>レベル</a:t>
             </a:r>
           </a:p>
           <a:p>
             <a:pPr lvl="2"/>
             <a:r>
-              <a:rPr kumimoji="1" lang="ja-JP" altLang="en-US" smtClean="0"/>
+              <a:rPr kumimoji="1" lang="ja-JP" altLang="en-US"/>
               <a:t>第 </a:t>
             </a:r>
             <a:r>
-              <a:rPr kumimoji="1" lang="en-US" altLang="ja-JP" smtClean="0"/>
+              <a:rPr kumimoji="1" lang="en-US" altLang="ja-JP"/>
               <a:t>3 </a:t>
             </a:r>
             <a:r>
-              <a:rPr kumimoji="1" lang="ja-JP" altLang="en-US" smtClean="0"/>
+              <a:rPr kumimoji="1" lang="ja-JP" altLang="en-US"/>
               <a:t>レベル</a:t>
             </a:r>
           </a:p>
           <a:p>
             <a:pPr lvl="3"/>
             <a:r>
-              <a:rPr kumimoji="1" lang="ja-JP" altLang="en-US" smtClean="0"/>
+              <a:rPr kumimoji="1" lang="ja-JP" altLang="en-US"/>
               <a:t>第 </a:t>
             </a:r>
             <a:r>
-              <a:rPr kumimoji="1" lang="en-US" altLang="ja-JP" smtClean="0"/>
+              <a:rPr kumimoji="1" lang="en-US" altLang="ja-JP"/>
               <a:t>4 </a:t>
             </a:r>
             <a:r>
-              <a:rPr kumimoji="1" lang="ja-JP" altLang="en-US" smtClean="0"/>
+              <a:rPr kumimoji="1" lang="ja-JP" altLang="en-US"/>
               <a:t>レベル</a:t>
             </a:r>
           </a:p>
           <a:p>
             <a:pPr lvl="4"/>
             <a:r>
-              <a:rPr kumimoji="1" lang="ja-JP" altLang="en-US" smtClean="0"/>
+              <a:rPr kumimoji="1" lang="ja-JP" altLang="en-US"/>
               <a:t>第 </a:t>
             </a:r>
             <a:r>
-              <a:rPr kumimoji="1" lang="en-US" altLang="ja-JP" smtClean="0"/>
+              <a:rPr kumimoji="1" lang="en-US" altLang="ja-JP"/>
               <a:t>5 </a:t>
             </a:r>
             <a:r>
-              <a:rPr kumimoji="1" lang="ja-JP" altLang="en-US" smtClean="0"/>
+              <a:rPr kumimoji="1" lang="ja-JP" altLang="en-US"/>
               <a:t>レベル</a:t>
             </a:r>
-            <a:endParaRPr kumimoji="1" lang="ja-JP" altLang="en-US"/>
           </a:p>
         </p:txBody>
       </p:sp>
@@ -449,7 +445,7 @@
           <a:p>
             <a:fld id="{0E085FA6-3BB9-47BA-8D81-299A75D1B58A}" type="datetimeFigureOut">
               <a:rPr kumimoji="1" lang="ja-JP" altLang="en-US" smtClean="0"/>
-              <a:t>2025/4/17</a:t>
+              <a:t>2026/3/5</a:t>
             </a:fld>
             <a:endParaRPr kumimoji="1" lang="ja-JP" altLang="en-US"/>
           </a:p>
@@ -548,10 +544,9 @@
           <a:lstStyle/>
           <a:p>
             <a:r>
-              <a:rPr kumimoji="1" lang="ja-JP" altLang="en-US" smtClean="0"/>
+              <a:rPr kumimoji="1" lang="ja-JP" altLang="en-US"/>
               <a:t>マスター タイトルの書式設定</a:t>
             </a:r>
-            <a:endParaRPr kumimoji="1" lang="ja-JP" altLang="en-US"/>
           </a:p>
         </p:txBody>
       </p:sp>
@@ -577,70 +572,69 @@
           <a:p>
             <a:pPr lvl="0"/>
             <a:r>
-              <a:rPr kumimoji="1" lang="ja-JP" altLang="en-US" smtClean="0"/>
+              <a:rPr kumimoji="1" lang="ja-JP" altLang="en-US"/>
               <a:t>マスター テキストの書式設定</a:t>
             </a:r>
           </a:p>
           <a:p>
             <a:pPr lvl="1"/>
             <a:r>
-              <a:rPr kumimoji="1" lang="ja-JP" altLang="en-US" smtClean="0"/>
+              <a:rPr kumimoji="1" lang="ja-JP" altLang="en-US"/>
               <a:t>第 </a:t>
             </a:r>
             <a:r>
-              <a:rPr kumimoji="1" lang="en-US" altLang="ja-JP" smtClean="0"/>
+              <a:rPr kumimoji="1" lang="en-US" altLang="ja-JP"/>
               <a:t>2 </a:t>
             </a:r>
             <a:r>
-              <a:rPr kumimoji="1" lang="ja-JP" altLang="en-US" smtClean="0"/>
+              <a:rPr kumimoji="1" lang="ja-JP" altLang="en-US"/>
               <a:t>レベル</a:t>
             </a:r>
           </a:p>
           <a:p>
             <a:pPr lvl="2"/>
             <a:r>
-              <a:rPr kumimoji="1" lang="ja-JP" altLang="en-US" smtClean="0"/>
+              <a:rPr kumimoji="1" lang="ja-JP" altLang="en-US"/>
               <a:t>第 </a:t>
             </a:r>
             <a:r>
-              <a:rPr kumimoji="1" lang="en-US" altLang="ja-JP" smtClean="0"/>
+              <a:rPr kumimoji="1" lang="en-US" altLang="ja-JP"/>
               <a:t>3 </a:t>
             </a:r>
             <a:r>
-              <a:rPr kumimoji="1" lang="ja-JP" altLang="en-US" smtClean="0"/>
+              <a:rPr kumimoji="1" lang="ja-JP" altLang="en-US"/>
               <a:t>レベル</a:t>
             </a:r>
           </a:p>
           <a:p>
             <a:pPr lvl="3"/>
             <a:r>
-              <a:rPr kumimoji="1" lang="ja-JP" altLang="en-US" smtClean="0"/>
+              <a:rPr kumimoji="1" lang="ja-JP" altLang="en-US"/>
               <a:t>第 </a:t>
             </a:r>
             <a:r>
-              <a:rPr kumimoji="1" lang="en-US" altLang="ja-JP" smtClean="0"/>
+              <a:rPr kumimoji="1" lang="en-US" altLang="ja-JP"/>
               <a:t>4 </a:t>
             </a:r>
             <a:r>
-              <a:rPr kumimoji="1" lang="ja-JP" altLang="en-US" smtClean="0"/>
+              <a:rPr kumimoji="1" lang="ja-JP" altLang="en-US"/>
               <a:t>レベル</a:t>
             </a:r>
           </a:p>
           <a:p>
             <a:pPr lvl="4"/>
             <a:r>
-              <a:rPr kumimoji="1" lang="ja-JP" altLang="en-US" smtClean="0"/>
+              <a:rPr kumimoji="1" lang="ja-JP" altLang="en-US"/>
               <a:t>第 </a:t>
             </a:r>
             <a:r>
-              <a:rPr kumimoji="1" lang="en-US" altLang="ja-JP" smtClean="0"/>
+              <a:rPr kumimoji="1" lang="en-US" altLang="ja-JP"/>
               <a:t>5 </a:t>
             </a:r>
             <a:r>
-              <a:rPr kumimoji="1" lang="ja-JP" altLang="en-US" smtClean="0"/>
+              <a:rPr kumimoji="1" lang="ja-JP" altLang="en-US"/>
               <a:t>レベル</a:t>
             </a:r>
-            <a:endParaRPr kumimoji="1" lang="ja-JP" altLang="en-US"/>
           </a:p>
         </p:txBody>
       </p:sp>
@@ -661,7 +655,7 @@
           <a:p>
             <a:fld id="{0E085FA6-3BB9-47BA-8D81-299A75D1B58A}" type="datetimeFigureOut">
               <a:rPr kumimoji="1" lang="ja-JP" altLang="en-US" smtClean="0"/>
-              <a:t>2025/4/17</a:t>
+              <a:t>2026/3/5</a:t>
             </a:fld>
             <a:endParaRPr kumimoji="1" lang="ja-JP" altLang="en-US"/>
           </a:p>
@@ -755,10 +749,9 @@
           <a:lstStyle/>
           <a:p>
             <a:r>
-              <a:rPr kumimoji="1" lang="ja-JP" altLang="en-US" smtClean="0"/>
+              <a:rPr kumimoji="1" lang="ja-JP" altLang="en-US"/>
               <a:t>マスター タイトルの書式設定</a:t>
             </a:r>
-            <a:endParaRPr kumimoji="1" lang="ja-JP" altLang="en-US"/>
           </a:p>
         </p:txBody>
       </p:sp>
@@ -779,70 +772,69 @@
           <a:p>
             <a:pPr lvl="0"/>
             <a:r>
-              <a:rPr kumimoji="1" lang="ja-JP" altLang="en-US" smtClean="0"/>
+              <a:rPr kumimoji="1" lang="ja-JP" altLang="en-US"/>
               <a:t>マスター テキストの書式設定</a:t>
             </a:r>
           </a:p>
           <a:p>
             <a:pPr lvl="1"/>
             <a:r>
-              <a:rPr kumimoji="1" lang="ja-JP" altLang="en-US" smtClean="0"/>
+              <a:rPr kumimoji="1" lang="ja-JP" altLang="en-US"/>
               <a:t>第 </a:t>
             </a:r>
             <a:r>
-              <a:rPr kumimoji="1" lang="en-US" altLang="ja-JP" smtClean="0"/>
+              <a:rPr kumimoji="1" lang="en-US" altLang="ja-JP"/>
               <a:t>2 </a:t>
             </a:r>
             <a:r>
-              <a:rPr kumimoji="1" lang="ja-JP" altLang="en-US" smtClean="0"/>
+              <a:rPr kumimoji="1" lang="ja-JP" altLang="en-US"/>
               <a:t>レベル</a:t>
             </a:r>
           </a:p>
           <a:p>
             <a:pPr lvl="2"/>
             <a:r>
-              <a:rPr kumimoji="1" lang="ja-JP" altLang="en-US" smtClean="0"/>
+              <a:rPr kumimoji="1" lang="ja-JP" altLang="en-US"/>
               <a:t>第 </a:t>
             </a:r>
             <a:r>
-              <a:rPr kumimoji="1" lang="en-US" altLang="ja-JP" smtClean="0"/>
+              <a:rPr kumimoji="1" lang="en-US" altLang="ja-JP"/>
               <a:t>3 </a:t>
             </a:r>
             <a:r>
-              <a:rPr kumimoji="1" lang="ja-JP" altLang="en-US" smtClean="0"/>
+              <a:rPr kumimoji="1" lang="ja-JP" altLang="en-US"/>
               <a:t>レベル</a:t>
             </a:r>
           </a:p>
           <a:p>
             <a:pPr lvl="3"/>
             <a:r>
-              <a:rPr kumimoji="1" lang="ja-JP" altLang="en-US" smtClean="0"/>
+              <a:rPr kumimoji="1" lang="ja-JP" altLang="en-US"/>
               <a:t>第 </a:t>
             </a:r>
             <a:r>
-              <a:rPr kumimoji="1" lang="en-US" altLang="ja-JP" smtClean="0"/>
+              <a:rPr kumimoji="1" lang="en-US" altLang="ja-JP"/>
               <a:t>4 </a:t>
             </a:r>
             <a:r>
-              <a:rPr kumimoji="1" lang="ja-JP" altLang="en-US" smtClean="0"/>
+              <a:rPr kumimoji="1" lang="ja-JP" altLang="en-US"/>
               <a:t>レベル</a:t>
             </a:r>
           </a:p>
           <a:p>
             <a:pPr lvl="4"/>
             <a:r>
-              <a:rPr kumimoji="1" lang="ja-JP" altLang="en-US" smtClean="0"/>
+              <a:rPr kumimoji="1" lang="ja-JP" altLang="en-US"/>
               <a:t>第 </a:t>
             </a:r>
             <a:r>
-              <a:rPr kumimoji="1" lang="en-US" altLang="ja-JP" smtClean="0"/>
+              <a:rPr kumimoji="1" lang="en-US" altLang="ja-JP"/>
               <a:t>5 </a:t>
             </a:r>
             <a:r>
-              <a:rPr kumimoji="1" lang="ja-JP" altLang="en-US" smtClean="0"/>
+              <a:rPr kumimoji="1" lang="ja-JP" altLang="en-US"/>
               <a:t>レベル</a:t>
             </a:r>
-            <a:endParaRPr kumimoji="1" lang="ja-JP" altLang="en-US"/>
           </a:p>
         </p:txBody>
       </p:sp>
@@ -863,7 +855,7 @@
           <a:p>
             <a:fld id="{0E085FA6-3BB9-47BA-8D81-299A75D1B58A}" type="datetimeFigureOut">
               <a:rPr kumimoji="1" lang="ja-JP" altLang="en-US" smtClean="0"/>
-              <a:t>2025/4/17</a:t>
+              <a:t>2026/3/5</a:t>
             </a:fld>
             <a:endParaRPr kumimoji="1" lang="ja-JP" altLang="en-US"/>
           </a:p>
@@ -966,10 +958,9 @@
           </a:lstStyle>
           <a:p>
             <a:r>
-              <a:rPr kumimoji="1" lang="ja-JP" altLang="en-US" smtClean="0"/>
+              <a:rPr kumimoji="1" lang="ja-JP" altLang="en-US"/>
               <a:t>マスター タイトルの書式設定</a:t>
             </a:r>
-            <a:endParaRPr kumimoji="1" lang="ja-JP" altLang="en-US"/>
           </a:p>
         </p:txBody>
       </p:sp>
@@ -1086,7 +1077,7 @@
           <a:p>
             <a:pPr lvl="0"/>
             <a:r>
-              <a:rPr kumimoji="1" lang="ja-JP" altLang="en-US" smtClean="0"/>
+              <a:rPr kumimoji="1" lang="ja-JP" altLang="en-US"/>
               <a:t>マスター テキストの書式設定</a:t>
             </a:r>
           </a:p>
@@ -1109,7 +1100,7 @@
           <a:p>
             <a:fld id="{0E085FA6-3BB9-47BA-8D81-299A75D1B58A}" type="datetimeFigureOut">
               <a:rPr kumimoji="1" lang="ja-JP" altLang="en-US" smtClean="0"/>
-              <a:t>2025/4/17</a:t>
+              <a:t>2026/3/5</a:t>
             </a:fld>
             <a:endParaRPr kumimoji="1" lang="ja-JP" altLang="en-US"/>
           </a:p>
@@ -1203,10 +1194,9 @@
           <a:lstStyle/>
           <a:p>
             <a:r>
-              <a:rPr kumimoji="1" lang="ja-JP" altLang="en-US" smtClean="0"/>
+              <a:rPr kumimoji="1" lang="ja-JP" altLang="en-US"/>
               <a:t>マスター タイトルの書式設定</a:t>
             </a:r>
-            <a:endParaRPr kumimoji="1" lang="ja-JP" altLang="en-US"/>
           </a:p>
         </p:txBody>
       </p:sp>
@@ -1232,70 +1222,69 @@
           <a:p>
             <a:pPr lvl="0"/>
             <a:r>
-              <a:rPr kumimoji="1" lang="ja-JP" altLang="en-US" smtClean="0"/>
+              <a:rPr kumimoji="1" lang="ja-JP" altLang="en-US"/>
               <a:t>マスター テキストの書式設定</a:t>
             </a:r>
           </a:p>
           <a:p>
             <a:pPr lvl="1"/>
             <a:r>
-              <a:rPr kumimoji="1" lang="ja-JP" altLang="en-US" smtClean="0"/>
+              <a:rPr kumimoji="1" lang="ja-JP" altLang="en-US"/>
               <a:t>第 </a:t>
             </a:r>
             <a:r>
-              <a:rPr kumimoji="1" lang="en-US" altLang="ja-JP" smtClean="0"/>
+              <a:rPr kumimoji="1" lang="en-US" altLang="ja-JP"/>
               <a:t>2 </a:t>
             </a:r>
             <a:r>
-              <a:rPr kumimoji="1" lang="ja-JP" altLang="en-US" smtClean="0"/>
+              <a:rPr kumimoji="1" lang="ja-JP" altLang="en-US"/>
               <a:t>レベル</a:t>
             </a:r>
           </a:p>
           <a:p>
             <a:pPr lvl="2"/>
             <a:r>
-              <a:rPr kumimoji="1" lang="ja-JP" altLang="en-US" smtClean="0"/>
+              <a:rPr kumimoji="1" lang="ja-JP" altLang="en-US"/>
               <a:t>第 </a:t>
             </a:r>
             <a:r>
-              <a:rPr kumimoji="1" lang="en-US" altLang="ja-JP" smtClean="0"/>
+              <a:rPr kumimoji="1" lang="en-US" altLang="ja-JP"/>
               <a:t>3 </a:t>
             </a:r>
             <a:r>
-              <a:rPr kumimoji="1" lang="ja-JP" altLang="en-US" smtClean="0"/>
+              <a:rPr kumimoji="1" lang="ja-JP" altLang="en-US"/>
               <a:t>レベル</a:t>
             </a:r>
           </a:p>
           <a:p>
             <a:pPr lvl="3"/>
             <a:r>
-              <a:rPr kumimoji="1" lang="ja-JP" altLang="en-US" smtClean="0"/>
+              <a:rPr kumimoji="1" lang="ja-JP" altLang="en-US"/>
               <a:t>第 </a:t>
             </a:r>
             <a:r>
-              <a:rPr kumimoji="1" lang="en-US" altLang="ja-JP" smtClean="0"/>
+              <a:rPr kumimoji="1" lang="en-US" altLang="ja-JP"/>
               <a:t>4 </a:t>
             </a:r>
             <a:r>
-              <a:rPr kumimoji="1" lang="ja-JP" altLang="en-US" smtClean="0"/>
+              <a:rPr kumimoji="1" lang="ja-JP" altLang="en-US"/>
               <a:t>レベル</a:t>
             </a:r>
           </a:p>
           <a:p>
             <a:pPr lvl="4"/>
             <a:r>
-              <a:rPr kumimoji="1" lang="ja-JP" altLang="en-US" smtClean="0"/>
+              <a:rPr kumimoji="1" lang="ja-JP" altLang="en-US"/>
               <a:t>第 </a:t>
             </a:r>
             <a:r>
-              <a:rPr kumimoji="1" lang="en-US" altLang="ja-JP" smtClean="0"/>
+              <a:rPr kumimoji="1" lang="en-US" altLang="ja-JP"/>
               <a:t>5 </a:t>
             </a:r>
             <a:r>
-              <a:rPr kumimoji="1" lang="ja-JP" altLang="en-US" smtClean="0"/>
+              <a:rPr kumimoji="1" lang="ja-JP" altLang="en-US"/>
               <a:t>レベル</a:t>
             </a:r>
-            <a:endParaRPr kumimoji="1" lang="ja-JP" altLang="en-US"/>
           </a:p>
         </p:txBody>
       </p:sp>
@@ -1321,70 +1310,69 @@
           <a:p>
             <a:pPr lvl="0"/>
             <a:r>
-              <a:rPr kumimoji="1" lang="ja-JP" altLang="en-US" smtClean="0"/>
+              <a:rPr kumimoji="1" lang="ja-JP" altLang="en-US"/>
               <a:t>マスター テキストの書式設定</a:t>
             </a:r>
           </a:p>
           <a:p>
             <a:pPr lvl="1"/>
             <a:r>
-              <a:rPr kumimoji="1" lang="ja-JP" altLang="en-US" smtClean="0"/>
+              <a:rPr kumimoji="1" lang="ja-JP" altLang="en-US"/>
               <a:t>第 </a:t>
             </a:r>
             <a:r>
-              <a:rPr kumimoji="1" lang="en-US" altLang="ja-JP" smtClean="0"/>
+              <a:rPr kumimoji="1" lang="en-US" altLang="ja-JP"/>
               <a:t>2 </a:t>
             </a:r>
             <a:r>
-              <a:rPr kumimoji="1" lang="ja-JP" altLang="en-US" smtClean="0"/>
+              <a:rPr kumimoji="1" lang="ja-JP" altLang="en-US"/>
               <a:t>レベル</a:t>
             </a:r>
           </a:p>
           <a:p>
             <a:pPr lvl="2"/>
             <a:r>
-              <a:rPr kumimoji="1" lang="ja-JP" altLang="en-US" smtClean="0"/>
+              <a:rPr kumimoji="1" lang="ja-JP" altLang="en-US"/>
               <a:t>第 </a:t>
             </a:r>
             <a:r>
-              <a:rPr kumimoji="1" lang="en-US" altLang="ja-JP" smtClean="0"/>
+              <a:rPr kumimoji="1" lang="en-US" altLang="ja-JP"/>
               <a:t>3 </a:t>
             </a:r>
             <a:r>
-              <a:rPr kumimoji="1" lang="ja-JP" altLang="en-US" smtClean="0"/>
+              <a:rPr kumimoji="1" lang="ja-JP" altLang="en-US"/>
               <a:t>レベル</a:t>
             </a:r>
           </a:p>
           <a:p>
             <a:pPr lvl="3"/>
             <a:r>
-              <a:rPr kumimoji="1" lang="ja-JP" altLang="en-US" smtClean="0"/>
+              <a:rPr kumimoji="1" lang="ja-JP" altLang="en-US"/>
               <a:t>第 </a:t>
             </a:r>
             <a:r>
-              <a:rPr kumimoji="1" lang="en-US" altLang="ja-JP" smtClean="0"/>
+              <a:rPr kumimoji="1" lang="en-US" altLang="ja-JP"/>
               <a:t>4 </a:t>
             </a:r>
             <a:r>
-              <a:rPr kumimoji="1" lang="ja-JP" altLang="en-US" smtClean="0"/>
+              <a:rPr kumimoji="1" lang="ja-JP" altLang="en-US"/>
               <a:t>レベル</a:t>
             </a:r>
           </a:p>
           <a:p>
             <a:pPr lvl="4"/>
             <a:r>
-              <a:rPr kumimoji="1" lang="ja-JP" altLang="en-US" smtClean="0"/>
+              <a:rPr kumimoji="1" lang="ja-JP" altLang="en-US"/>
               <a:t>第 </a:t>
             </a:r>
             <a:r>
-              <a:rPr kumimoji="1" lang="en-US" altLang="ja-JP" smtClean="0"/>
+              <a:rPr kumimoji="1" lang="en-US" altLang="ja-JP"/>
               <a:t>5 </a:t>
             </a:r>
             <a:r>
-              <a:rPr kumimoji="1" lang="ja-JP" altLang="en-US" smtClean="0"/>
+              <a:rPr kumimoji="1" lang="ja-JP" altLang="en-US"/>
               <a:t>レベル</a:t>
             </a:r>
-            <a:endParaRPr kumimoji="1" lang="ja-JP" altLang="en-US"/>
           </a:p>
         </p:txBody>
       </p:sp>
@@ -1405,7 +1393,7 @@
           <a:p>
             <a:fld id="{0E085FA6-3BB9-47BA-8D81-299A75D1B58A}" type="datetimeFigureOut">
               <a:rPr kumimoji="1" lang="ja-JP" altLang="en-US" smtClean="0"/>
-              <a:t>2025/4/17</a:t>
+              <a:t>2026/3/5</a:t>
             </a:fld>
             <a:endParaRPr kumimoji="1" lang="ja-JP" altLang="en-US"/>
           </a:p>
@@ -1504,10 +1492,9 @@
           <a:lstStyle/>
           <a:p>
             <a:r>
-              <a:rPr kumimoji="1" lang="ja-JP" altLang="en-US" smtClean="0"/>
+              <a:rPr kumimoji="1" lang="ja-JP" altLang="en-US"/>
               <a:t>マスター タイトルの書式設定</a:t>
             </a:r>
-            <a:endParaRPr kumimoji="1" lang="ja-JP" altLang="en-US"/>
           </a:p>
         </p:txBody>
       </p:sp>
@@ -1570,7 +1557,7 @@
           <a:p>
             <a:pPr lvl="0"/>
             <a:r>
-              <a:rPr kumimoji="1" lang="ja-JP" altLang="en-US" smtClean="0"/>
+              <a:rPr kumimoji="1" lang="ja-JP" altLang="en-US"/>
               <a:t>マスター テキストの書式設定</a:t>
             </a:r>
           </a:p>
@@ -1598,70 +1585,69 @@
           <a:p>
             <a:pPr lvl="0"/>
             <a:r>
-              <a:rPr kumimoji="1" lang="ja-JP" altLang="en-US" smtClean="0"/>
+              <a:rPr kumimoji="1" lang="ja-JP" altLang="en-US"/>
               <a:t>マスター テキストの書式設定</a:t>
             </a:r>
           </a:p>
           <a:p>
             <a:pPr lvl="1"/>
             <a:r>
-              <a:rPr kumimoji="1" lang="ja-JP" altLang="en-US" smtClean="0"/>
+              <a:rPr kumimoji="1" lang="ja-JP" altLang="en-US"/>
               <a:t>第 </a:t>
             </a:r>
             <a:r>
-              <a:rPr kumimoji="1" lang="en-US" altLang="ja-JP" smtClean="0"/>
+              <a:rPr kumimoji="1" lang="en-US" altLang="ja-JP"/>
               <a:t>2 </a:t>
             </a:r>
             <a:r>
-              <a:rPr kumimoji="1" lang="ja-JP" altLang="en-US" smtClean="0"/>
+              <a:rPr kumimoji="1" lang="ja-JP" altLang="en-US"/>
               <a:t>レベル</a:t>
             </a:r>
           </a:p>
           <a:p>
             <a:pPr lvl="2"/>
             <a:r>
-              <a:rPr kumimoji="1" lang="ja-JP" altLang="en-US" smtClean="0"/>
+              <a:rPr kumimoji="1" lang="ja-JP" altLang="en-US"/>
               <a:t>第 </a:t>
             </a:r>
             <a:r>
-              <a:rPr kumimoji="1" lang="en-US" altLang="ja-JP" smtClean="0"/>
+              <a:rPr kumimoji="1" lang="en-US" altLang="ja-JP"/>
               <a:t>3 </a:t>
             </a:r>
             <a:r>
-              <a:rPr kumimoji="1" lang="ja-JP" altLang="en-US" smtClean="0"/>
+              <a:rPr kumimoji="1" lang="ja-JP" altLang="en-US"/>
               <a:t>レベル</a:t>
             </a:r>
           </a:p>
           <a:p>
             <a:pPr lvl="3"/>
             <a:r>
-              <a:rPr kumimoji="1" lang="ja-JP" altLang="en-US" smtClean="0"/>
+              <a:rPr kumimoji="1" lang="ja-JP" altLang="en-US"/>
               <a:t>第 </a:t>
             </a:r>
             <a:r>
-              <a:rPr kumimoji="1" lang="en-US" altLang="ja-JP" smtClean="0"/>
+              <a:rPr kumimoji="1" lang="en-US" altLang="ja-JP"/>
               <a:t>4 </a:t>
             </a:r>
             <a:r>
-              <a:rPr kumimoji="1" lang="ja-JP" altLang="en-US" smtClean="0"/>
+              <a:rPr kumimoji="1" lang="ja-JP" altLang="en-US"/>
               <a:t>レベル</a:t>
             </a:r>
           </a:p>
           <a:p>
             <a:pPr lvl="4"/>
             <a:r>
-              <a:rPr kumimoji="1" lang="ja-JP" altLang="en-US" smtClean="0"/>
+              <a:rPr kumimoji="1" lang="ja-JP" altLang="en-US"/>
               <a:t>第 </a:t>
             </a:r>
             <a:r>
-              <a:rPr kumimoji="1" lang="en-US" altLang="ja-JP" smtClean="0"/>
+              <a:rPr kumimoji="1" lang="en-US" altLang="ja-JP"/>
               <a:t>5 </a:t>
             </a:r>
             <a:r>
-              <a:rPr kumimoji="1" lang="ja-JP" altLang="en-US" smtClean="0"/>
+              <a:rPr kumimoji="1" lang="ja-JP" altLang="en-US"/>
               <a:t>レベル</a:t>
             </a:r>
-            <a:endParaRPr kumimoji="1" lang="ja-JP" altLang="en-US"/>
           </a:p>
         </p:txBody>
       </p:sp>
@@ -1724,7 +1710,7 @@
           <a:p>
             <a:pPr lvl="0"/>
             <a:r>
-              <a:rPr kumimoji="1" lang="ja-JP" altLang="en-US" smtClean="0"/>
+              <a:rPr kumimoji="1" lang="ja-JP" altLang="en-US"/>
               <a:t>マスター テキストの書式設定</a:t>
             </a:r>
           </a:p>
@@ -1752,70 +1738,69 @@
           <a:p>
             <a:pPr lvl="0"/>
             <a:r>
-              <a:rPr kumimoji="1" lang="ja-JP" altLang="en-US" smtClean="0"/>
+              <a:rPr kumimoji="1" lang="ja-JP" altLang="en-US"/>
               <a:t>マスター テキストの書式設定</a:t>
             </a:r>
           </a:p>
           <a:p>
             <a:pPr lvl="1"/>
             <a:r>
-              <a:rPr kumimoji="1" lang="ja-JP" altLang="en-US" smtClean="0"/>
+              <a:rPr kumimoji="1" lang="ja-JP" altLang="en-US"/>
               <a:t>第 </a:t>
             </a:r>
             <a:r>
-              <a:rPr kumimoji="1" lang="en-US" altLang="ja-JP" smtClean="0"/>
+              <a:rPr kumimoji="1" lang="en-US" altLang="ja-JP"/>
               <a:t>2 </a:t>
             </a:r>
             <a:r>
-              <a:rPr kumimoji="1" lang="ja-JP" altLang="en-US" smtClean="0"/>
+              <a:rPr kumimoji="1" lang="ja-JP" altLang="en-US"/>
               <a:t>レベル</a:t>
             </a:r>
           </a:p>
           <a:p>
             <a:pPr lvl="2"/>
             <a:r>
-              <a:rPr kumimoji="1" lang="ja-JP" altLang="en-US" smtClean="0"/>
+              <a:rPr kumimoji="1" lang="ja-JP" altLang="en-US"/>
               <a:t>第 </a:t>
             </a:r>
             <a:r>
-              <a:rPr kumimoji="1" lang="en-US" altLang="ja-JP" smtClean="0"/>
+              <a:rPr kumimoji="1" lang="en-US" altLang="ja-JP"/>
               <a:t>3 </a:t>
             </a:r>
             <a:r>
-              <a:rPr kumimoji="1" lang="ja-JP" altLang="en-US" smtClean="0"/>
+              <a:rPr kumimoji="1" lang="ja-JP" altLang="en-US"/>
               <a:t>レベル</a:t>
             </a:r>
           </a:p>
           <a:p>
             <a:pPr lvl="3"/>
             <a:r>
-              <a:rPr kumimoji="1" lang="ja-JP" altLang="en-US" smtClean="0"/>
+              <a:rPr kumimoji="1" lang="ja-JP" altLang="en-US"/>
               <a:t>第 </a:t>
             </a:r>
             <a:r>
-              <a:rPr kumimoji="1" lang="en-US" altLang="ja-JP" smtClean="0"/>
+              <a:rPr kumimoji="1" lang="en-US" altLang="ja-JP"/>
               <a:t>4 </a:t>
             </a:r>
             <a:r>
-              <a:rPr kumimoji="1" lang="ja-JP" altLang="en-US" smtClean="0"/>
+              <a:rPr kumimoji="1" lang="ja-JP" altLang="en-US"/>
               <a:t>レベル</a:t>
             </a:r>
           </a:p>
           <a:p>
             <a:pPr lvl="4"/>
             <a:r>
-              <a:rPr kumimoji="1" lang="ja-JP" altLang="en-US" smtClean="0"/>
+              <a:rPr kumimoji="1" lang="ja-JP" altLang="en-US"/>
               <a:t>第 </a:t>
             </a:r>
             <a:r>
-              <a:rPr kumimoji="1" lang="en-US" altLang="ja-JP" smtClean="0"/>
+              <a:rPr kumimoji="1" lang="en-US" altLang="ja-JP"/>
               <a:t>5 </a:t>
             </a:r>
             <a:r>
-              <a:rPr kumimoji="1" lang="ja-JP" altLang="en-US" smtClean="0"/>
+              <a:rPr kumimoji="1" lang="ja-JP" altLang="en-US"/>
               <a:t>レベル</a:t>
             </a:r>
-            <a:endParaRPr kumimoji="1" lang="ja-JP" altLang="en-US"/>
           </a:p>
         </p:txBody>
       </p:sp>
@@ -1836,7 +1821,7 @@
           <a:p>
             <a:fld id="{0E085FA6-3BB9-47BA-8D81-299A75D1B58A}" type="datetimeFigureOut">
               <a:rPr kumimoji="1" lang="ja-JP" altLang="en-US" smtClean="0"/>
-              <a:t>2025/4/17</a:t>
+              <a:t>2026/3/5</a:t>
             </a:fld>
             <a:endParaRPr kumimoji="1" lang="ja-JP" altLang="en-US"/>
           </a:p>
@@ -1930,10 +1915,9 @@
           <a:lstStyle/>
           <a:p>
             <a:r>
-              <a:rPr kumimoji="1" lang="ja-JP" altLang="en-US" smtClean="0"/>
+              <a:rPr kumimoji="1" lang="ja-JP" altLang="en-US"/>
               <a:t>マスター タイトルの書式設定</a:t>
             </a:r>
-            <a:endParaRPr kumimoji="1" lang="ja-JP" altLang="en-US"/>
           </a:p>
         </p:txBody>
       </p:sp>
@@ -1954,7 +1938,7 @@
           <a:p>
             <a:fld id="{0E085FA6-3BB9-47BA-8D81-299A75D1B58A}" type="datetimeFigureOut">
               <a:rPr kumimoji="1" lang="ja-JP" altLang="en-US" smtClean="0"/>
-              <a:t>2025/4/17</a:t>
+              <a:t>2026/3/5</a:t>
             </a:fld>
             <a:endParaRPr kumimoji="1" lang="ja-JP" altLang="en-US"/>
           </a:p>
@@ -2049,7 +2033,7 @@
           <a:p>
             <a:fld id="{0E085FA6-3BB9-47BA-8D81-299A75D1B58A}" type="datetimeFigureOut">
               <a:rPr kumimoji="1" lang="ja-JP" altLang="en-US" smtClean="0"/>
-              <a:t>2025/4/17</a:t>
+              <a:t>2026/3/5</a:t>
             </a:fld>
             <a:endParaRPr kumimoji="1" lang="ja-JP" altLang="en-US"/>
           </a:p>
@@ -2152,10 +2136,9 @@
           </a:lstStyle>
           <a:p>
             <a:r>
-              <a:rPr kumimoji="1" lang="ja-JP" altLang="en-US" smtClean="0"/>
+              <a:rPr kumimoji="1" lang="ja-JP" altLang="en-US"/>
               <a:t>マスター タイトルの書式設定</a:t>
             </a:r>
-            <a:endParaRPr kumimoji="1" lang="ja-JP" altLang="en-US"/>
           </a:p>
         </p:txBody>
       </p:sp>
@@ -2209,70 +2192,69 @@
           <a:p>
             <a:pPr lvl="0"/>
             <a:r>
-              <a:rPr kumimoji="1" lang="ja-JP" altLang="en-US" smtClean="0"/>
+              <a:rPr kumimoji="1" lang="ja-JP" altLang="en-US"/>
               <a:t>マスター テキストの書式設定</a:t>
             </a:r>
           </a:p>
           <a:p>
             <a:pPr lvl="1"/>
             <a:r>
-              <a:rPr kumimoji="1" lang="ja-JP" altLang="en-US" smtClean="0"/>
+              <a:rPr kumimoji="1" lang="ja-JP" altLang="en-US"/>
               <a:t>第 </a:t>
             </a:r>
             <a:r>
-              <a:rPr kumimoji="1" lang="en-US" altLang="ja-JP" smtClean="0"/>
+              <a:rPr kumimoji="1" lang="en-US" altLang="ja-JP"/>
               <a:t>2 </a:t>
             </a:r>
             <a:r>
-              <a:rPr kumimoji="1" lang="ja-JP" altLang="en-US" smtClean="0"/>
+              <a:rPr kumimoji="1" lang="ja-JP" altLang="en-US"/>
               <a:t>レベル</a:t>
             </a:r>
           </a:p>
           <a:p>
             <a:pPr lvl="2"/>
             <a:r>
-              <a:rPr kumimoji="1" lang="ja-JP" altLang="en-US" smtClean="0"/>
+              <a:rPr kumimoji="1" lang="ja-JP" altLang="en-US"/>
               <a:t>第 </a:t>
             </a:r>
             <a:r>
-              <a:rPr kumimoji="1" lang="en-US" altLang="ja-JP" smtClean="0"/>
+              <a:rPr kumimoji="1" lang="en-US" altLang="ja-JP"/>
               <a:t>3 </a:t>
             </a:r>
             <a:r>
-              <a:rPr kumimoji="1" lang="ja-JP" altLang="en-US" smtClean="0"/>
+              <a:rPr kumimoji="1" lang="ja-JP" altLang="en-US"/>
               <a:t>レベル</a:t>
             </a:r>
           </a:p>
           <a:p>
             <a:pPr lvl="3"/>
             <a:r>
-              <a:rPr kumimoji="1" lang="ja-JP" altLang="en-US" smtClean="0"/>
+              <a:rPr kumimoji="1" lang="ja-JP" altLang="en-US"/>
               <a:t>第 </a:t>
             </a:r>
             <a:r>
-              <a:rPr kumimoji="1" lang="en-US" altLang="ja-JP" smtClean="0"/>
+              <a:rPr kumimoji="1" lang="en-US" altLang="ja-JP"/>
               <a:t>4 </a:t>
             </a:r>
             <a:r>
-              <a:rPr kumimoji="1" lang="ja-JP" altLang="en-US" smtClean="0"/>
+              <a:rPr kumimoji="1" lang="ja-JP" altLang="en-US"/>
               <a:t>レベル</a:t>
             </a:r>
           </a:p>
           <a:p>
             <a:pPr lvl="4"/>
             <a:r>
-              <a:rPr kumimoji="1" lang="ja-JP" altLang="en-US" smtClean="0"/>
+              <a:rPr kumimoji="1" lang="ja-JP" altLang="en-US"/>
               <a:t>第 </a:t>
             </a:r>
             <a:r>
-              <a:rPr kumimoji="1" lang="en-US" altLang="ja-JP" smtClean="0"/>
+              <a:rPr kumimoji="1" lang="en-US" altLang="ja-JP"/>
               <a:t>5 </a:t>
             </a:r>
             <a:r>
-              <a:rPr kumimoji="1" lang="ja-JP" altLang="en-US" smtClean="0"/>
+              <a:rPr kumimoji="1" lang="ja-JP" altLang="en-US"/>
               <a:t>レベル</a:t>
             </a:r>
-            <a:endParaRPr kumimoji="1" lang="ja-JP" altLang="en-US"/>
           </a:p>
         </p:txBody>
       </p:sp>
@@ -2335,7 +2317,7 @@
           <a:p>
             <a:pPr lvl="0"/>
             <a:r>
-              <a:rPr kumimoji="1" lang="ja-JP" altLang="en-US" smtClean="0"/>
+              <a:rPr kumimoji="1" lang="ja-JP" altLang="en-US"/>
               <a:t>マスター テキストの書式設定</a:t>
             </a:r>
           </a:p>
@@ -2358,7 +2340,7 @@
           <a:p>
             <a:fld id="{0E085FA6-3BB9-47BA-8D81-299A75D1B58A}" type="datetimeFigureOut">
               <a:rPr kumimoji="1" lang="ja-JP" altLang="en-US" smtClean="0"/>
-              <a:t>2025/4/17</a:t>
+              <a:t>2026/3/5</a:t>
             </a:fld>
             <a:endParaRPr kumimoji="1" lang="ja-JP" altLang="en-US"/>
           </a:p>
@@ -2461,10 +2443,9 @@
           </a:lstStyle>
           <a:p>
             <a:r>
-              <a:rPr kumimoji="1" lang="ja-JP" altLang="en-US" smtClean="0"/>
+              <a:rPr kumimoji="1" lang="ja-JP" altLang="en-US"/>
               <a:t>マスター タイトルの書式設定</a:t>
             </a:r>
-            <a:endParaRPr kumimoji="1" lang="ja-JP" altLang="en-US"/>
           </a:p>
         </p:txBody>
       </p:sp>
@@ -2588,7 +2569,7 @@
           <a:p>
             <a:pPr lvl="0"/>
             <a:r>
-              <a:rPr kumimoji="1" lang="ja-JP" altLang="en-US" smtClean="0"/>
+              <a:rPr kumimoji="1" lang="ja-JP" altLang="en-US"/>
               <a:t>マスター テキストの書式設定</a:t>
             </a:r>
           </a:p>
@@ -2611,7 +2592,7 @@
           <a:p>
             <a:fld id="{0E085FA6-3BB9-47BA-8D81-299A75D1B58A}" type="datetimeFigureOut">
               <a:rPr kumimoji="1" lang="ja-JP" altLang="en-US" smtClean="0"/>
-              <a:t>2025/4/17</a:t>
+              <a:t>2026/3/5</a:t>
             </a:fld>
             <a:endParaRPr kumimoji="1" lang="ja-JP" altLang="en-US"/>
           </a:p>
@@ -2720,10 +2701,9 @@
           <a:lstStyle/>
           <a:p>
             <a:r>
-              <a:rPr kumimoji="1" lang="ja-JP" altLang="en-US" smtClean="0"/>
+              <a:rPr kumimoji="1" lang="ja-JP" altLang="en-US"/>
               <a:t>マスター タイトルの書式設定</a:t>
             </a:r>
-            <a:endParaRPr kumimoji="1" lang="ja-JP" altLang="en-US"/>
           </a:p>
         </p:txBody>
       </p:sp>
@@ -2754,70 +2734,69 @@
           <a:p>
             <a:pPr lvl="0"/>
             <a:r>
-              <a:rPr kumimoji="1" lang="ja-JP" altLang="en-US" smtClean="0"/>
+              <a:rPr kumimoji="1" lang="ja-JP" altLang="en-US"/>
               <a:t>マスター テキストの書式設定</a:t>
             </a:r>
           </a:p>
           <a:p>
             <a:pPr lvl="1"/>
             <a:r>
-              <a:rPr kumimoji="1" lang="ja-JP" altLang="en-US" smtClean="0"/>
+              <a:rPr kumimoji="1" lang="ja-JP" altLang="en-US"/>
               <a:t>第 </a:t>
             </a:r>
             <a:r>
-              <a:rPr kumimoji="1" lang="en-US" altLang="ja-JP" smtClean="0"/>
+              <a:rPr kumimoji="1" lang="en-US" altLang="ja-JP"/>
               <a:t>2 </a:t>
             </a:r>
             <a:r>
-              <a:rPr kumimoji="1" lang="ja-JP" altLang="en-US" smtClean="0"/>
+              <a:rPr kumimoji="1" lang="ja-JP" altLang="en-US"/>
               <a:t>レベル</a:t>
             </a:r>
           </a:p>
           <a:p>
             <a:pPr lvl="2"/>
             <a:r>
-              <a:rPr kumimoji="1" lang="ja-JP" altLang="en-US" smtClean="0"/>
+              <a:rPr kumimoji="1" lang="ja-JP" altLang="en-US"/>
               <a:t>第 </a:t>
             </a:r>
             <a:r>
-              <a:rPr kumimoji="1" lang="en-US" altLang="ja-JP" smtClean="0"/>
+              <a:rPr kumimoji="1" lang="en-US" altLang="ja-JP"/>
               <a:t>3 </a:t>
             </a:r>
             <a:r>
-              <a:rPr kumimoji="1" lang="ja-JP" altLang="en-US" smtClean="0"/>
+              <a:rPr kumimoji="1" lang="ja-JP" altLang="en-US"/>
               <a:t>レベル</a:t>
             </a:r>
           </a:p>
           <a:p>
             <a:pPr lvl="3"/>
             <a:r>
-              <a:rPr kumimoji="1" lang="ja-JP" altLang="en-US" smtClean="0"/>
+              <a:rPr kumimoji="1" lang="ja-JP" altLang="en-US"/>
               <a:t>第 </a:t>
             </a:r>
             <a:r>
-              <a:rPr kumimoji="1" lang="en-US" altLang="ja-JP" smtClean="0"/>
+              <a:rPr kumimoji="1" lang="en-US" altLang="ja-JP"/>
               <a:t>4 </a:t>
             </a:r>
             <a:r>
-              <a:rPr kumimoji="1" lang="ja-JP" altLang="en-US" smtClean="0"/>
+              <a:rPr kumimoji="1" lang="ja-JP" altLang="en-US"/>
               <a:t>レベル</a:t>
             </a:r>
           </a:p>
           <a:p>
             <a:pPr lvl="4"/>
             <a:r>
-              <a:rPr kumimoji="1" lang="ja-JP" altLang="en-US" smtClean="0"/>
+              <a:rPr kumimoji="1" lang="ja-JP" altLang="en-US"/>
               <a:t>第 </a:t>
             </a:r>
             <a:r>
-              <a:rPr kumimoji="1" lang="en-US" altLang="ja-JP" smtClean="0"/>
+              <a:rPr kumimoji="1" lang="en-US" altLang="ja-JP"/>
               <a:t>5 </a:t>
             </a:r>
             <a:r>
-              <a:rPr kumimoji="1" lang="ja-JP" altLang="en-US" smtClean="0"/>
+              <a:rPr kumimoji="1" lang="ja-JP" altLang="en-US"/>
               <a:t>レベル</a:t>
             </a:r>
-            <a:endParaRPr kumimoji="1" lang="ja-JP" altLang="en-US"/>
           </a:p>
         </p:txBody>
       </p:sp>
@@ -2856,7 +2835,7 @@
           <a:p>
             <a:fld id="{0E085FA6-3BB9-47BA-8D81-299A75D1B58A}" type="datetimeFigureOut">
               <a:rPr kumimoji="1" lang="ja-JP" altLang="en-US" smtClean="0"/>
-              <a:t>2025/4/17</a:t>
+              <a:t>2026/3/5</a:t>
             </a:fld>
             <a:endParaRPr kumimoji="1" lang="ja-JP" altLang="en-US"/>
           </a:p>
@@ -3275,9 +3254,7 @@
           <a:prstGeom prst="rect">
             <a:avLst/>
           </a:prstGeom>
-          <a:solidFill>
-            <a:schemeClr val="bg1"/>
-          </a:solidFill>
+          <a:noFill/>
           <a:ln>
             <a:solidFill>
               <a:schemeClr val="tx1"/>
@@ -3323,9 +3300,7 @@
           <a:prstGeom prst="rect">
             <a:avLst/>
           </a:prstGeom>
-          <a:solidFill>
-            <a:schemeClr val="bg1"/>
-          </a:solidFill>
+          <a:noFill/>
           <a:ln>
             <a:solidFill>
               <a:schemeClr val="tx1"/>
@@ -3371,9 +3346,7 @@
           <a:prstGeom prst="rect">
             <a:avLst/>
           </a:prstGeom>
-          <a:solidFill>
-            <a:schemeClr val="bg1"/>
-          </a:solidFill>
+          <a:noFill/>
           <a:ln>
             <a:solidFill>
               <a:schemeClr val="tx1"/>
@@ -3419,9 +3392,7 @@
           <a:prstGeom prst="rect">
             <a:avLst/>
           </a:prstGeom>
-          <a:solidFill>
-            <a:schemeClr val="bg1"/>
-          </a:solidFill>
+          <a:noFill/>
           <a:ln>
             <a:solidFill>
               <a:schemeClr val="tx1"/>
@@ -3467,9 +3438,7 @@
           <a:prstGeom prst="rect">
             <a:avLst/>
           </a:prstGeom>
-          <a:solidFill>
-            <a:schemeClr val="bg1"/>
-          </a:solidFill>
+          <a:noFill/>
           <a:ln>
             <a:solidFill>
               <a:schemeClr val="tx1"/>
@@ -3515,9 +3484,7 @@
           <a:prstGeom prst="rect">
             <a:avLst/>
           </a:prstGeom>
-          <a:solidFill>
-            <a:schemeClr val="bg1"/>
-          </a:solidFill>
+          <a:noFill/>
           <a:ln>
             <a:solidFill>
               <a:schemeClr val="tx1"/>
@@ -3563,9 +3530,7 @@
           <a:prstGeom prst="rect">
             <a:avLst/>
           </a:prstGeom>
-          <a:solidFill>
-            <a:schemeClr val="bg1"/>
-          </a:solidFill>
+          <a:noFill/>
           <a:ln>
             <a:solidFill>
               <a:schemeClr val="tx1"/>
@@ -3611,9 +3576,7 @@
           <a:prstGeom prst="rect">
             <a:avLst/>
           </a:prstGeom>
-          <a:solidFill>
-            <a:schemeClr val="bg1"/>
-          </a:solidFill>
+          <a:noFill/>
           <a:ln>
             <a:solidFill>
               <a:schemeClr val="tx1"/>
@@ -3659,9 +3622,7 @@
           <a:prstGeom prst="rect">
             <a:avLst/>
           </a:prstGeom>
-          <a:solidFill>
-            <a:schemeClr val="bg1"/>
-          </a:solidFill>
+          <a:noFill/>
           <a:ln>
             <a:solidFill>
               <a:schemeClr val="tx1"/>
@@ -3707,9 +3668,7 @@
           <a:prstGeom prst="rect">
             <a:avLst/>
           </a:prstGeom>
-          <a:solidFill>
-            <a:schemeClr val="bg1"/>
-          </a:solidFill>
+          <a:noFill/>
           <a:ln>
             <a:solidFill>
               <a:schemeClr val="tx1"/>
@@ -3755,9 +3714,7 @@
           <a:prstGeom prst="rect">
             <a:avLst/>
           </a:prstGeom>
-          <a:solidFill>
-            <a:schemeClr val="bg1"/>
-          </a:solidFill>
+          <a:noFill/>
           <a:ln>
             <a:solidFill>
               <a:schemeClr val="tx1"/>
@@ -3803,9 +3760,7 @@
           <a:prstGeom prst="rect">
             <a:avLst/>
           </a:prstGeom>
-          <a:solidFill>
-            <a:schemeClr val="bg1"/>
-          </a:solidFill>
+          <a:noFill/>
           <a:ln>
             <a:solidFill>
               <a:schemeClr val="tx1"/>
@@ -3851,9 +3806,7 @@
           <a:prstGeom prst="rect">
             <a:avLst/>
           </a:prstGeom>
-          <a:solidFill>
-            <a:schemeClr val="bg1"/>
-          </a:solidFill>
+          <a:noFill/>
           <a:ln>
             <a:solidFill>
               <a:schemeClr val="tx1"/>
@@ -3899,9 +3852,7 @@
           <a:prstGeom prst="rect">
             <a:avLst/>
           </a:prstGeom>
-          <a:solidFill>
-            <a:schemeClr val="bg1"/>
-          </a:solidFill>
+          <a:noFill/>
           <a:ln>
             <a:solidFill>
               <a:schemeClr val="tx1"/>
@@ -3947,9 +3898,7 @@
           <a:prstGeom prst="rect">
             <a:avLst/>
           </a:prstGeom>
-          <a:solidFill>
-            <a:schemeClr val="bg1"/>
-          </a:solidFill>
+          <a:noFill/>
           <a:ln>
             <a:solidFill>
               <a:schemeClr val="tx1"/>
@@ -4169,9 +4118,7 @@
           <a:prstGeom prst="rect">
             <a:avLst/>
           </a:prstGeom>
-          <a:solidFill>
-            <a:schemeClr val="bg1"/>
-          </a:solidFill>
+          <a:noFill/>
           <a:ln>
             <a:solidFill>
               <a:schemeClr val="tx1"/>
@@ -4217,9 +4164,7 @@
           <a:prstGeom prst="rect">
             <a:avLst/>
           </a:prstGeom>
-          <a:solidFill>
-            <a:schemeClr val="bg1"/>
-          </a:solidFill>
+          <a:noFill/>
           <a:ln>
             <a:solidFill>
               <a:schemeClr val="tx1"/>
@@ -4265,9 +4210,7 @@
           <a:prstGeom prst="rect">
             <a:avLst/>
           </a:prstGeom>
-          <a:solidFill>
-            <a:schemeClr val="bg1"/>
-          </a:solidFill>
+          <a:noFill/>
           <a:ln>
             <a:solidFill>
               <a:schemeClr val="tx1"/>
@@ -4313,9 +4256,7 @@
           <a:prstGeom prst="rect">
             <a:avLst/>
           </a:prstGeom>
-          <a:solidFill>
-            <a:schemeClr val="bg1"/>
-          </a:solidFill>
+          <a:noFill/>
           <a:ln>
             <a:solidFill>
               <a:schemeClr val="tx1"/>
@@ -4361,9 +4302,7 @@
           <a:prstGeom prst="rect">
             <a:avLst/>
           </a:prstGeom>
-          <a:solidFill>
-            <a:schemeClr val="bg1"/>
-          </a:solidFill>
+          <a:noFill/>
           <a:ln>
             <a:solidFill>
               <a:schemeClr val="tx1"/>
@@ -4409,9 +4348,7 @@
           <a:prstGeom prst="rect">
             <a:avLst/>
           </a:prstGeom>
-          <a:solidFill>
-            <a:schemeClr val="bg1"/>
-          </a:solidFill>
+          <a:noFill/>
           <a:ln>
             <a:solidFill>
               <a:schemeClr val="tx1"/>
@@ -4457,9 +4394,7 @@
           <a:prstGeom prst="rect">
             <a:avLst/>
           </a:prstGeom>
-          <a:solidFill>
-            <a:schemeClr val="bg1"/>
-          </a:solidFill>
+          <a:noFill/>
           <a:ln>
             <a:solidFill>
               <a:schemeClr val="tx1"/>
@@ -4505,9 +4440,7 @@
           <a:prstGeom prst="rect">
             <a:avLst/>
           </a:prstGeom>
-          <a:solidFill>
-            <a:schemeClr val="bg1"/>
-          </a:solidFill>
+          <a:noFill/>
           <a:ln>
             <a:solidFill>
               <a:schemeClr val="tx1"/>
@@ -4553,9 +4486,7 @@
           <a:prstGeom prst="rect">
             <a:avLst/>
           </a:prstGeom>
-          <a:solidFill>
-            <a:schemeClr val="bg1"/>
-          </a:solidFill>
+          <a:noFill/>
           <a:ln>
             <a:solidFill>
               <a:schemeClr val="tx1"/>
@@ -4601,9 +4532,7 @@
           <a:prstGeom prst="rect">
             <a:avLst/>
           </a:prstGeom>
-          <a:solidFill>
-            <a:schemeClr val="bg1"/>
-          </a:solidFill>
+          <a:noFill/>
           <a:ln>
             <a:solidFill>
               <a:schemeClr val="tx1"/>
@@ -4649,9 +4578,7 @@
           <a:prstGeom prst="rect">
             <a:avLst/>
           </a:prstGeom>
-          <a:solidFill>
-            <a:schemeClr val="bg1"/>
-          </a:solidFill>
+          <a:noFill/>
           <a:ln>
             <a:solidFill>
               <a:schemeClr val="tx1"/>
@@ -4697,9 +4624,7 @@
           <a:prstGeom prst="rect">
             <a:avLst/>
           </a:prstGeom>
-          <a:solidFill>
-            <a:schemeClr val="bg1"/>
-          </a:solidFill>
+          <a:noFill/>
           <a:ln>
             <a:solidFill>
               <a:schemeClr val="tx1"/>
@@ -4745,9 +4670,7 @@
           <a:prstGeom prst="rect">
             <a:avLst/>
           </a:prstGeom>
-          <a:solidFill>
-            <a:schemeClr val="bg1"/>
-          </a:solidFill>
+          <a:noFill/>
           <a:ln>
             <a:solidFill>
               <a:schemeClr val="tx1"/>
@@ -4793,9 +4716,7 @@
           <a:prstGeom prst="rect">
             <a:avLst/>
           </a:prstGeom>
-          <a:solidFill>
-            <a:schemeClr val="bg1"/>
-          </a:solidFill>
+          <a:noFill/>
           <a:ln>
             <a:solidFill>
               <a:schemeClr val="tx1"/>
@@ -4841,9 +4762,7 @@
           <a:prstGeom prst="rect">
             <a:avLst/>
           </a:prstGeom>
-          <a:solidFill>
-            <a:schemeClr val="bg1"/>
-          </a:solidFill>
+          <a:noFill/>
           <a:ln>
             <a:solidFill>
               <a:schemeClr val="tx1"/>
